--- a/docs/quickguides/pkw/pptx/T07-08_Quick_Guide_oneSCM_Von_Dokumenten_und_Signatur_zur_Aktivierungspruefung_Pkw.pptx
+++ b/docs/quickguides/pkw/pptx/T07-08_Quick_Guide_oneSCM_Von_Dokumenten_und_Signatur_zur_Aktivierungspruefung_Pkw.pptx
@@ -1437,7 +1437,7 @@
                 <a:ea typeface="MB Corpo S Text Office" pitchFamily="34" charset="-122"/>
                 <a:cs typeface="MB Corpo S Text Office" pitchFamily="34" charset="-120"/>
               </a:rPr>
-              <a:t>Dieses Dokument ist interaktiv – Verweise auf Handbuchkapitel und Systeme sind als Links hinterlegt.</a:t>
+              <a:t>Verweise auf Handbuchkapitel und Systeme sind hervorgehoben; E-Mail-Adressen sind als Links hinterlegt.</a:t>
             </a:r>
             <a:endParaRPr lang="en-US" sz="900" dirty="0"/>
           </a:p>
